--- a/prompt-engineering-course/prompt_engineering_presentation_support/PE_S7_cost-latency.pptx
+++ b/prompt-engineering-course/prompt_engineering_presentation_support/PE_S7_cost-latency.pptx
@@ -3503,7 +3503,7 @@
     <p:bg>
       <p:bgPr>
         <a:solidFill>
-          <a:srgbClr val="281C16"/>
+          <a:srgbClr val="301A12"/>
         </a:solidFill>
       </p:bgPr>
     </p:bg>
@@ -3529,12 +3529,12 @@
         </p:nvSpPr>
         <p:spPr>
           <a:xfrm>
-            <a:off x="10588752" y="502920"/>
-            <a:ext cx="1051560" cy="384048"/>
+            <a:off x="10405872" y="457200"/>
+            <a:ext cx="1234440" cy="457200"/>
           </a:xfrm>
           <a:prstGeom prst="roundRect">
             <a:avLst>
-              <a:gd name="adj" fmla="val 47619"/>
+              <a:gd name="adj" fmla="val 20000"/>
             </a:avLst>
           </a:prstGeom>
           <a:solidFill>
@@ -3551,8 +3551,8 @@
         </p:nvSpPr>
         <p:spPr>
           <a:xfrm>
-            <a:off x="10588752" y="502920"/>
-            <a:ext cx="1051560" cy="384048"/>
+            <a:off x="10405872" y="457200"/>
+            <a:ext cx="1234440" cy="457200"/>
           </a:xfrm>
           <a:prstGeom prst="rect">
             <a:avLst/>
@@ -3568,17 +3568,17 @@
               <a:buNone/>
             </a:pPr>
             <a:r>
-              <a:rPr lang="en-US" sz="1300" b="1" spc="200" kern="0" dirty="0">
-                <a:solidFill>
-                  <a:srgbClr val="281C16"/>
+              <a:rPr lang="en-US" sz="1400" b="1" spc="200" kern="0" dirty="0">
+                <a:solidFill>
+                  <a:srgbClr val="301A12"/>
                 </a:solidFill>
                 <a:latin typeface="Courier New" pitchFamily="34" charset="0"/>
                 <a:ea typeface="Courier New" pitchFamily="34" charset="-122"/>
                 <a:cs typeface="Courier New" pitchFamily="34" charset="-120"/>
               </a:rPr>
-              <a:t>GIT</a:t>
-            </a:r>
-            <a:endParaRPr lang="en-US" sz="1300" dirty="0"/>
+              <a:t>● GIT</a:t>
+            </a:r>
+            <a:endParaRPr lang="en-US" sz="1400" dirty="0"/>
           </a:p>
         </p:txBody>
       </p:sp>
@@ -3648,7 +3648,7 @@
             <a:r>
               <a:rPr lang="en-US" sz="3400" b="1" dirty="0">
                 <a:solidFill>
-                  <a:srgbClr val="C0CAF5"/>
+                  <a:srgbClr val="F6E6DB"/>
                 </a:solidFill>
                 <a:latin typeface="Calibri" pitchFamily="34" charset="0"/>
                 <a:ea typeface="Calibri" pitchFamily="34" charset="-122"/>
@@ -3677,11 +3677,11 @@
             </a:avLst>
           </a:prstGeom>
           <a:solidFill>
-            <a:srgbClr val="24283B"/>
+            <a:srgbClr val="3E2418"/>
           </a:solidFill>
           <a:ln w="12700">
             <a:solidFill>
-              <a:srgbClr val="2A2E42"/>
+              <a:srgbClr val="5C3421"/>
             </a:solidFill>
             <a:prstDash val="solid"/>
           </a:ln>
@@ -3734,7 +3734,7 @@
             <a:r>
               <a:rPr lang="en-US" sz="1600" b="1" dirty="0">
                 <a:solidFill>
-                  <a:srgbClr val="1A1B26"/>
+                  <a:srgbClr val="301A12"/>
                 </a:solidFill>
                 <a:latin typeface="Courier New" pitchFamily="34" charset="0"/>
                 <a:ea typeface="Courier New" pitchFamily="34" charset="-122"/>
@@ -3816,7 +3816,7 @@
             <a:r>
               <a:rPr lang="en-US" sz="1400" dirty="0">
                 <a:solidFill>
-                  <a:srgbClr val="A9B1D6"/>
+                  <a:srgbClr val="E0C6B6"/>
                 </a:solidFill>
                 <a:latin typeface="Calibri" pitchFamily="34" charset="0"/>
                 <a:ea typeface="Calibri" pitchFamily="34" charset="-122"/>
@@ -3837,7 +3837,7 @@
             <a:r>
               <a:rPr lang="en-US" sz="1400" dirty="0">
                 <a:solidFill>
-                  <a:srgbClr val="A9B1D6"/>
+                  <a:srgbClr val="E0C6B6"/>
                 </a:solidFill>
                 <a:latin typeface="Calibri" pitchFamily="34" charset="0"/>
                 <a:ea typeface="Calibri" pitchFamily="34" charset="-122"/>
@@ -3858,7 +3858,7 @@
             <a:r>
               <a:rPr lang="en-US" sz="1400" dirty="0">
                 <a:solidFill>
-                  <a:srgbClr val="A9B1D6"/>
+                  <a:srgbClr val="E0C6B6"/>
                 </a:solidFill>
                 <a:latin typeface="Calibri" pitchFamily="34" charset="0"/>
                 <a:ea typeface="Calibri" pitchFamily="34" charset="-122"/>
@@ -3879,7 +3879,7 @@
             <a:r>
               <a:rPr lang="en-US" sz="1400" dirty="0">
                 <a:solidFill>
-                  <a:srgbClr val="A9B1D6"/>
+                  <a:srgbClr val="E0C6B6"/>
                 </a:solidFill>
                 <a:latin typeface="Calibri" pitchFamily="34" charset="0"/>
                 <a:ea typeface="Calibri" pitchFamily="34" charset="-122"/>
@@ -3908,11 +3908,11 @@
             </a:avLst>
           </a:prstGeom>
           <a:solidFill>
-            <a:srgbClr val="24283B"/>
+            <a:srgbClr val="3E2418"/>
           </a:solidFill>
           <a:ln w="12700">
             <a:solidFill>
-              <a:srgbClr val="2A2E42"/>
+              <a:srgbClr val="5C3421"/>
             </a:solidFill>
             <a:prstDash val="solid"/>
           </a:ln>
@@ -3965,7 +3965,7 @@
             <a:r>
               <a:rPr lang="en-US" sz="1600" b="1" dirty="0">
                 <a:solidFill>
-                  <a:srgbClr val="1A1B26"/>
+                  <a:srgbClr val="301A12"/>
                 </a:solidFill>
                 <a:latin typeface="Courier New" pitchFamily="34" charset="0"/>
                 <a:ea typeface="Courier New" pitchFamily="34" charset="-122"/>
@@ -4047,7 +4047,7 @@
             <a:r>
               <a:rPr lang="en-US" sz="1400" dirty="0">
                 <a:solidFill>
-                  <a:srgbClr val="A9B1D6"/>
+                  <a:srgbClr val="E0C6B6"/>
                 </a:solidFill>
                 <a:latin typeface="Calibri" pitchFamily="34" charset="0"/>
                 <a:ea typeface="Calibri" pitchFamily="34" charset="-122"/>
@@ -4068,7 +4068,7 @@
             <a:r>
               <a:rPr lang="en-US" sz="1400" dirty="0">
                 <a:solidFill>
-                  <a:srgbClr val="A9B1D6"/>
+                  <a:srgbClr val="E0C6B6"/>
                 </a:solidFill>
                 <a:latin typeface="Calibri" pitchFamily="34" charset="0"/>
                 <a:ea typeface="Calibri" pitchFamily="34" charset="-122"/>
@@ -4089,7 +4089,7 @@
             <a:r>
               <a:rPr lang="en-US" sz="1400" dirty="0">
                 <a:solidFill>
-                  <a:srgbClr val="A9B1D6"/>
+                  <a:srgbClr val="E0C6B6"/>
                 </a:solidFill>
                 <a:latin typeface="Calibri" pitchFamily="34" charset="0"/>
                 <a:ea typeface="Calibri" pitchFamily="34" charset="-122"/>
@@ -4110,7 +4110,7 @@
             <a:r>
               <a:rPr lang="en-US" sz="1400" dirty="0">
                 <a:solidFill>
-                  <a:srgbClr val="A9B1D6"/>
+                  <a:srgbClr val="E0C6B6"/>
                 </a:solidFill>
                 <a:latin typeface="Calibri" pitchFamily="34" charset="0"/>
                 <a:ea typeface="Calibri" pitchFamily="34" charset="-122"/>
@@ -4379,8 +4379,47 @@
         </p:nvSpPr>
         <p:spPr>
           <a:xfrm>
-            <a:off x="548640" y="2011680"/>
-            <a:ext cx="6126480" cy="3840480"/>
+            <a:off x="548640" y="1627632"/>
+            <a:ext cx="10881360" cy="502920"/>
+          </a:xfrm>
+          <a:prstGeom prst="rect">
+            <a:avLst/>
+          </a:prstGeom>
+          <a:noFill/>
+          <a:ln/>
+        </p:spPr>
+        <p:txBody>
+          <a:bodyPr wrap="square" lIns="0" tIns="0" rIns="0" bIns="0" rtlCol="0" anchor="t"/>
+          <a:lstStyle/>
+          <a:p>
+            <a:pPr algn="l" indent="0" marL="0">
+              <a:buNone/>
+            </a:pPr>
+            <a:r>
+              <a:rPr lang="en-US" sz="1500" dirty="0">
+                <a:solidFill>
+                  <a:srgbClr val="A9B1D6"/>
+                </a:solidFill>
+                <a:latin typeface="Calibri" pitchFamily="34" charset="0"/>
+                <a:ea typeface="Calibri" pitchFamily="34" charset="-122"/>
+                <a:cs typeface="Calibri" pitchFamily="34" charset="-120"/>
+              </a:rPr>
+              <a:t>Every prompt you write has a price tag and a stopwatch attached — good engineers keep both in view.</a:t>
+            </a:r>
+            <a:endParaRPr lang="en-US" sz="1500" dirty="0"/>
+          </a:p>
+        </p:txBody>
+      </p:sp>
+      <p:sp>
+        <p:nvSpPr>
+          <p:cNvPr id="5" name="Text 3"/>
+          <p:cNvSpPr txBox="1"/>
+          <p:nvPr/>
+        </p:nvSpPr>
+        <p:spPr>
+          <a:xfrm>
+            <a:off x="548640" y="2340864"/>
+            <a:ext cx="6126480" cy="3511296"/>
           </a:xfrm>
           <a:prstGeom prst="rect">
             <a:avLst/>
@@ -4518,18 +4557,18 @@
       </p:sp>
       <p:sp>
         <p:nvSpPr>
-          <p:cNvPr id="5" name="Shape 3"/>
+          <p:cNvPr id="6" name="Shape 4"/>
           <p:cNvSpPr/>
           <p:nvPr/>
         </p:nvSpPr>
         <p:spPr>
           <a:xfrm>
-            <a:off x="6995160" y="2148840"/>
-            <a:ext cx="4645152" cy="3383280"/>
+            <a:off x="6995160" y="2478024"/>
+            <a:ext cx="4645152" cy="3054096"/>
           </a:xfrm>
           <a:prstGeom prst="roundRect">
             <a:avLst>
-              <a:gd name="adj" fmla="val 2432"/>
+              <a:gd name="adj" fmla="val 2695"/>
             </a:avLst>
           </a:prstGeom>
           <a:solidFill>
@@ -4545,13 +4584,13 @@
       </p:sp>
       <p:sp>
         <p:nvSpPr>
-          <p:cNvPr id="6" name="Shape 4"/>
+          <p:cNvPr id="7" name="Shape 5"/>
           <p:cNvSpPr/>
           <p:nvPr/>
         </p:nvSpPr>
         <p:spPr>
           <a:xfrm>
-            <a:off x="7269480" y="2423160"/>
+            <a:off x="7269480" y="2752344"/>
             <a:ext cx="457200" cy="457200"/>
           </a:xfrm>
           <a:prstGeom prst="ellipse">
@@ -4565,13 +4604,13 @@
       </p:sp>
       <p:sp>
         <p:nvSpPr>
-          <p:cNvPr id="7" name="Text 5"/>
-          <p:cNvSpPr txBox="1"/>
-          <p:nvPr/>
-        </p:nvSpPr>
-        <p:spPr>
-          <a:xfrm>
-            <a:off x="7818120" y="2450592"/>
+          <p:cNvPr id="8" name="Text 6"/>
+          <p:cNvSpPr txBox="1"/>
+          <p:nvPr/>
+        </p:nvSpPr>
+        <p:spPr>
+          <a:xfrm>
+            <a:off x="7818120" y="2779776"/>
             <a:ext cx="3657600" cy="411480"/>
           </a:xfrm>
           <a:prstGeom prst="rect">
@@ -4604,14 +4643,14 @@
       </p:sp>
       <p:sp>
         <p:nvSpPr>
-          <p:cNvPr id="8" name="Text 6"/>
-          <p:cNvSpPr txBox="1"/>
-          <p:nvPr/>
-        </p:nvSpPr>
-        <p:spPr>
-          <a:xfrm>
-            <a:off x="7269480" y="3108960"/>
-            <a:ext cx="4160520" cy="2286000"/>
+          <p:cNvPr id="9" name="Text 7"/>
+          <p:cNvSpPr txBox="1"/>
+          <p:nvPr/>
+        </p:nvSpPr>
+        <p:spPr>
+          <a:xfrm>
+            <a:off x="7269480" y="3438144"/>
+            <a:ext cx="4160520" cy="1865376"/>
           </a:xfrm>
           <a:prstGeom prst="rect">
             <a:avLst/>
@@ -4643,7 +4682,7 @@
       </p:sp>
       <p:sp>
         <p:nvSpPr>
-          <p:cNvPr id="9" name="Shape 7"/>
+          <p:cNvPr id="10" name="Shape 8"/>
           <p:cNvSpPr/>
           <p:nvPr/>
         </p:nvSpPr>
@@ -4665,7 +4704,7 @@
       </p:sp>
       <p:sp>
         <p:nvSpPr>
-          <p:cNvPr id="10" name="Text 8"/>
+          <p:cNvPr id="11" name="Text 9"/>
           <p:cNvSpPr txBox="1"/>
           <p:nvPr/>
         </p:nvSpPr>
@@ -4704,7 +4743,7 @@
       </p:sp>
       <p:sp>
         <p:nvSpPr>
-          <p:cNvPr id="11" name="Text 9"/>
+          <p:cNvPr id="12" name="Text 10"/>
           <p:cNvSpPr txBox="1"/>
           <p:nvPr/>
         </p:nvSpPr>
@@ -4743,7 +4782,7 @@
       </p:sp>
       <p:sp>
         <p:nvSpPr>
-          <p:cNvPr id="12" name="Text 10"/>
+          <p:cNvPr id="13" name="Text 11"/>
           <p:cNvSpPr txBox="1"/>
           <p:nvPr/>
         </p:nvSpPr>
@@ -4892,13 +4931,52 @@
       </p:sp>
       <p:sp>
         <p:nvSpPr>
-          <p:cNvPr id="4" name="Shape 2"/>
+          <p:cNvPr id="4" name="Text 2"/>
+          <p:cNvSpPr txBox="1"/>
+          <p:nvPr/>
+        </p:nvSpPr>
+        <p:spPr>
+          <a:xfrm>
+            <a:off x="548640" y="1627632"/>
+            <a:ext cx="10881360" cy="502920"/>
+          </a:xfrm>
+          <a:prstGeom prst="rect">
+            <a:avLst/>
+          </a:prstGeom>
+          <a:noFill/>
+          <a:ln/>
+        </p:spPr>
+        <p:txBody>
+          <a:bodyPr wrap="square" lIns="0" tIns="0" rIns="0" bIns="0" rtlCol="0" anchor="t"/>
+          <a:lstStyle/>
+          <a:p>
+            <a:pPr algn="l" indent="0" marL="0">
+              <a:buNone/>
+            </a:pPr>
+            <a:r>
+              <a:rPr lang="en-US" sz="1500" dirty="0">
+                <a:solidFill>
+                  <a:srgbClr val="A9B1D6"/>
+                </a:solidFill>
+                <a:latin typeface="Calibri" pitchFamily="34" charset="0"/>
+                <a:ea typeface="Calibri" pitchFamily="34" charset="-122"/>
+                <a:cs typeface="Calibri" pitchFamily="34" charset="-120"/>
+              </a:rPr>
+              <a:t>Four practical levers to make the same prompt cheaper and faster, ideally without a quality hit.</a:t>
+            </a:r>
+            <a:endParaRPr lang="en-US" sz="1500" dirty="0"/>
+          </a:p>
+        </p:txBody>
+      </p:sp>
+      <p:sp>
+        <p:nvSpPr>
+          <p:cNvPr id="5" name="Shape 3"/>
           <p:cNvSpPr/>
           <p:nvPr/>
         </p:nvSpPr>
         <p:spPr>
           <a:xfrm>
-            <a:off x="548640" y="2103120"/>
+            <a:off x="548640" y="2432304"/>
             <a:ext cx="5394960" cy="1810512"/>
           </a:xfrm>
           <a:prstGeom prst="roundRect">
@@ -4919,13 +4997,13 @@
       </p:sp>
       <p:sp>
         <p:nvSpPr>
-          <p:cNvPr id="5" name="Shape 3"/>
+          <p:cNvPr id="6" name="Shape 4"/>
           <p:cNvSpPr/>
           <p:nvPr/>
         </p:nvSpPr>
         <p:spPr>
           <a:xfrm>
-            <a:off x="822960" y="2395728"/>
+            <a:off x="822960" y="2724912"/>
             <a:ext cx="548640" cy="548640"/>
           </a:xfrm>
           <a:prstGeom prst="ellipse">
@@ -4939,13 +5017,13 @@
       </p:sp>
       <p:sp>
         <p:nvSpPr>
-          <p:cNvPr id="6" name="Text 4"/>
-          <p:cNvSpPr txBox="1"/>
-          <p:nvPr/>
-        </p:nvSpPr>
-        <p:spPr>
-          <a:xfrm>
-            <a:off x="822960" y="2395728"/>
+          <p:cNvPr id="7" name="Text 5"/>
+          <p:cNvSpPr txBox="1"/>
+          <p:nvPr/>
+        </p:nvSpPr>
+        <p:spPr>
+          <a:xfrm>
+            <a:off x="822960" y="2724912"/>
             <a:ext cx="548640" cy="548640"/>
           </a:xfrm>
           <a:prstGeom prst="rect">
@@ -4978,13 +5056,13 @@
       </p:sp>
       <p:sp>
         <p:nvSpPr>
-          <p:cNvPr id="7" name="Text 5"/>
-          <p:cNvSpPr txBox="1"/>
-          <p:nvPr/>
-        </p:nvSpPr>
-        <p:spPr>
-          <a:xfrm>
-            <a:off x="1508760" y="2359152"/>
+          <p:cNvPr id="8" name="Text 6"/>
+          <p:cNvSpPr txBox="1"/>
+          <p:nvPr/>
+        </p:nvSpPr>
+        <p:spPr>
+          <a:xfrm>
+            <a:off x="1508760" y="2688336"/>
             <a:ext cx="4206240" cy="548640"/>
           </a:xfrm>
           <a:prstGeom prst="rect">
@@ -5017,13 +5095,13 @@
       </p:sp>
       <p:sp>
         <p:nvSpPr>
-          <p:cNvPr id="8" name="Text 6"/>
-          <p:cNvSpPr txBox="1"/>
-          <p:nvPr/>
-        </p:nvSpPr>
-        <p:spPr>
-          <a:xfrm>
-            <a:off x="822960" y="3017520"/>
+          <p:cNvPr id="9" name="Text 7"/>
+          <p:cNvSpPr txBox="1"/>
+          <p:nvPr/>
+        </p:nvSpPr>
+        <p:spPr>
+          <a:xfrm>
+            <a:off x="822960" y="3346704"/>
             <a:ext cx="4846320" cy="822960"/>
           </a:xfrm>
           <a:prstGeom prst="rect">
@@ -5056,13 +5134,13 @@
       </p:sp>
       <p:sp>
         <p:nvSpPr>
-          <p:cNvPr id="9" name="Shape 7"/>
+          <p:cNvPr id="10" name="Shape 8"/>
           <p:cNvSpPr/>
           <p:nvPr/>
         </p:nvSpPr>
         <p:spPr>
           <a:xfrm>
-            <a:off x="6245352" y="2103120"/>
+            <a:off x="6245352" y="2432304"/>
             <a:ext cx="5394960" cy="1810512"/>
           </a:xfrm>
           <a:prstGeom prst="roundRect">
@@ -5083,13 +5161,13 @@
       </p:sp>
       <p:sp>
         <p:nvSpPr>
-          <p:cNvPr id="10" name="Shape 8"/>
+          <p:cNvPr id="11" name="Shape 9"/>
           <p:cNvSpPr/>
           <p:nvPr/>
         </p:nvSpPr>
         <p:spPr>
           <a:xfrm>
-            <a:off x="6519672" y="2395728"/>
+            <a:off x="6519672" y="2724912"/>
             <a:ext cx="548640" cy="548640"/>
           </a:xfrm>
           <a:prstGeom prst="ellipse">
@@ -5103,13 +5181,13 @@
       </p:sp>
       <p:sp>
         <p:nvSpPr>
-          <p:cNvPr id="11" name="Text 9"/>
-          <p:cNvSpPr txBox="1"/>
-          <p:nvPr/>
-        </p:nvSpPr>
-        <p:spPr>
-          <a:xfrm>
-            <a:off x="6519672" y="2395728"/>
+          <p:cNvPr id="12" name="Text 10"/>
+          <p:cNvSpPr txBox="1"/>
+          <p:nvPr/>
+        </p:nvSpPr>
+        <p:spPr>
+          <a:xfrm>
+            <a:off x="6519672" y="2724912"/>
             <a:ext cx="548640" cy="548640"/>
           </a:xfrm>
           <a:prstGeom prst="rect">
@@ -5142,13 +5220,13 @@
       </p:sp>
       <p:sp>
         <p:nvSpPr>
-          <p:cNvPr id="12" name="Text 10"/>
-          <p:cNvSpPr txBox="1"/>
-          <p:nvPr/>
-        </p:nvSpPr>
-        <p:spPr>
-          <a:xfrm>
-            <a:off x="7205472" y="2359152"/>
+          <p:cNvPr id="13" name="Text 11"/>
+          <p:cNvSpPr txBox="1"/>
+          <p:nvPr/>
+        </p:nvSpPr>
+        <p:spPr>
+          <a:xfrm>
+            <a:off x="7205472" y="2688336"/>
             <a:ext cx="4206240" cy="548640"/>
           </a:xfrm>
           <a:prstGeom prst="rect">
@@ -5181,13 +5259,13 @@
       </p:sp>
       <p:sp>
         <p:nvSpPr>
-          <p:cNvPr id="13" name="Text 11"/>
-          <p:cNvSpPr txBox="1"/>
-          <p:nvPr/>
-        </p:nvSpPr>
-        <p:spPr>
-          <a:xfrm>
-            <a:off x="6519672" y="3017520"/>
+          <p:cNvPr id="14" name="Text 12"/>
+          <p:cNvSpPr txBox="1"/>
+          <p:nvPr/>
+        </p:nvSpPr>
+        <p:spPr>
+          <a:xfrm>
+            <a:off x="6519672" y="3346704"/>
             <a:ext cx="4846320" cy="822960"/>
           </a:xfrm>
           <a:prstGeom prst="rect">
@@ -5220,13 +5298,13 @@
       </p:sp>
       <p:sp>
         <p:nvSpPr>
-          <p:cNvPr id="14" name="Shape 12"/>
+          <p:cNvPr id="15" name="Shape 13"/>
           <p:cNvSpPr/>
           <p:nvPr/>
         </p:nvSpPr>
         <p:spPr>
           <a:xfrm>
-            <a:off x="548640" y="4114800"/>
+            <a:off x="548640" y="4443984"/>
             <a:ext cx="5394960" cy="1810512"/>
           </a:xfrm>
           <a:prstGeom prst="roundRect">
@@ -5247,13 +5325,13 @@
       </p:sp>
       <p:sp>
         <p:nvSpPr>
-          <p:cNvPr id="15" name="Shape 13"/>
+          <p:cNvPr id="16" name="Shape 14"/>
           <p:cNvSpPr/>
           <p:nvPr/>
         </p:nvSpPr>
         <p:spPr>
           <a:xfrm>
-            <a:off x="822960" y="4407408"/>
+            <a:off x="822960" y="4736592"/>
             <a:ext cx="548640" cy="548640"/>
           </a:xfrm>
           <a:prstGeom prst="ellipse">
@@ -5267,13 +5345,13 @@
       </p:sp>
       <p:sp>
         <p:nvSpPr>
-          <p:cNvPr id="16" name="Text 14"/>
-          <p:cNvSpPr txBox="1"/>
-          <p:nvPr/>
-        </p:nvSpPr>
-        <p:spPr>
-          <a:xfrm>
-            <a:off x="822960" y="4407408"/>
+          <p:cNvPr id="17" name="Text 15"/>
+          <p:cNvSpPr txBox="1"/>
+          <p:nvPr/>
+        </p:nvSpPr>
+        <p:spPr>
+          <a:xfrm>
+            <a:off x="822960" y="4736592"/>
             <a:ext cx="548640" cy="548640"/>
           </a:xfrm>
           <a:prstGeom prst="rect">
@@ -5306,13 +5384,13 @@
       </p:sp>
       <p:sp>
         <p:nvSpPr>
-          <p:cNvPr id="17" name="Text 15"/>
-          <p:cNvSpPr txBox="1"/>
-          <p:nvPr/>
-        </p:nvSpPr>
-        <p:spPr>
-          <a:xfrm>
-            <a:off x="1508760" y="4370832"/>
+          <p:cNvPr id="18" name="Text 16"/>
+          <p:cNvSpPr txBox="1"/>
+          <p:nvPr/>
+        </p:nvSpPr>
+        <p:spPr>
+          <a:xfrm>
+            <a:off x="1508760" y="4700016"/>
             <a:ext cx="4206240" cy="548640"/>
           </a:xfrm>
           <a:prstGeom prst="rect">
@@ -5345,13 +5423,13 @@
       </p:sp>
       <p:sp>
         <p:nvSpPr>
-          <p:cNvPr id="18" name="Text 16"/>
-          <p:cNvSpPr txBox="1"/>
-          <p:nvPr/>
-        </p:nvSpPr>
-        <p:spPr>
-          <a:xfrm>
-            <a:off x="822960" y="5029200"/>
+          <p:cNvPr id="19" name="Text 17"/>
+          <p:cNvSpPr txBox="1"/>
+          <p:nvPr/>
+        </p:nvSpPr>
+        <p:spPr>
+          <a:xfrm>
+            <a:off x="822960" y="5358384"/>
             <a:ext cx="4846320" cy="822960"/>
           </a:xfrm>
           <a:prstGeom prst="rect">
@@ -5384,13 +5462,13 @@
       </p:sp>
       <p:sp>
         <p:nvSpPr>
-          <p:cNvPr id="19" name="Shape 17"/>
+          <p:cNvPr id="20" name="Shape 18"/>
           <p:cNvSpPr/>
           <p:nvPr/>
         </p:nvSpPr>
         <p:spPr>
           <a:xfrm>
-            <a:off x="6245352" y="4114800"/>
+            <a:off x="6245352" y="4443984"/>
             <a:ext cx="5394960" cy="1810512"/>
           </a:xfrm>
           <a:prstGeom prst="roundRect">
@@ -5411,13 +5489,13 @@
       </p:sp>
       <p:sp>
         <p:nvSpPr>
-          <p:cNvPr id="20" name="Shape 18"/>
+          <p:cNvPr id="21" name="Shape 19"/>
           <p:cNvSpPr/>
           <p:nvPr/>
         </p:nvSpPr>
         <p:spPr>
           <a:xfrm>
-            <a:off x="6519672" y="4407408"/>
+            <a:off x="6519672" y="4736592"/>
             <a:ext cx="548640" cy="548640"/>
           </a:xfrm>
           <a:prstGeom prst="ellipse">
@@ -5431,13 +5509,13 @@
       </p:sp>
       <p:sp>
         <p:nvSpPr>
-          <p:cNvPr id="21" name="Text 19"/>
-          <p:cNvSpPr txBox="1"/>
-          <p:nvPr/>
-        </p:nvSpPr>
-        <p:spPr>
-          <a:xfrm>
-            <a:off x="6519672" y="4407408"/>
+          <p:cNvPr id="22" name="Text 20"/>
+          <p:cNvSpPr txBox="1"/>
+          <p:nvPr/>
+        </p:nvSpPr>
+        <p:spPr>
+          <a:xfrm>
+            <a:off x="6519672" y="4736592"/>
             <a:ext cx="548640" cy="548640"/>
           </a:xfrm>
           <a:prstGeom prst="rect">
@@ -5470,13 +5548,13 @@
       </p:sp>
       <p:sp>
         <p:nvSpPr>
-          <p:cNvPr id="22" name="Text 20"/>
-          <p:cNvSpPr txBox="1"/>
-          <p:nvPr/>
-        </p:nvSpPr>
-        <p:spPr>
-          <a:xfrm>
-            <a:off x="7205472" y="4370832"/>
+          <p:cNvPr id="23" name="Text 21"/>
+          <p:cNvSpPr txBox="1"/>
+          <p:nvPr/>
+        </p:nvSpPr>
+        <p:spPr>
+          <a:xfrm>
+            <a:off x="7205472" y="4700016"/>
             <a:ext cx="4206240" cy="548640"/>
           </a:xfrm>
           <a:prstGeom prst="rect">
@@ -5509,13 +5587,13 @@
       </p:sp>
       <p:sp>
         <p:nvSpPr>
-          <p:cNvPr id="23" name="Text 21"/>
-          <p:cNvSpPr txBox="1"/>
-          <p:nvPr/>
-        </p:nvSpPr>
-        <p:spPr>
-          <a:xfrm>
-            <a:off x="6519672" y="5029200"/>
+          <p:cNvPr id="24" name="Text 22"/>
+          <p:cNvSpPr txBox="1"/>
+          <p:nvPr/>
+        </p:nvSpPr>
+        <p:spPr>
+          <a:xfrm>
+            <a:off x="6519672" y="5358384"/>
             <a:ext cx="4846320" cy="822960"/>
           </a:xfrm>
           <a:prstGeom prst="rect">
@@ -5548,7 +5626,7 @@
       </p:sp>
       <p:sp>
         <p:nvSpPr>
-          <p:cNvPr id="24" name="Shape 22"/>
+          <p:cNvPr id="25" name="Shape 23"/>
           <p:cNvSpPr/>
           <p:nvPr/>
         </p:nvSpPr>
@@ -5570,7 +5648,7 @@
       </p:sp>
       <p:sp>
         <p:nvSpPr>
-          <p:cNvPr id="25" name="Text 23"/>
+          <p:cNvPr id="26" name="Text 24"/>
           <p:cNvSpPr txBox="1"/>
           <p:nvPr/>
         </p:nvSpPr>
@@ -5609,7 +5687,7 @@
       </p:sp>
       <p:sp>
         <p:nvSpPr>
-          <p:cNvPr id="26" name="Text 24"/>
+          <p:cNvPr id="27" name="Text 25"/>
           <p:cNvSpPr txBox="1"/>
           <p:nvPr/>
         </p:nvSpPr>
@@ -5648,7 +5726,7 @@
       </p:sp>
       <p:sp>
         <p:nvSpPr>
-          <p:cNvPr id="27" name="Text 25"/>
+          <p:cNvPr id="28" name="Text 26"/>
           <p:cNvSpPr txBox="1"/>
           <p:nvPr/>
         </p:nvSpPr>
@@ -5797,18 +5875,57 @@
       </p:sp>
       <p:sp>
         <p:nvSpPr>
-          <p:cNvPr id="4" name="Shape 2"/>
+          <p:cNvPr id="4" name="Text 2"/>
+          <p:cNvSpPr txBox="1"/>
+          <p:nvPr/>
+        </p:nvSpPr>
+        <p:spPr>
+          <a:xfrm>
+            <a:off x="548640" y="1627632"/>
+            <a:ext cx="10881360" cy="502920"/>
+          </a:xfrm>
+          <a:prstGeom prst="rect">
+            <a:avLst/>
+          </a:prstGeom>
+          <a:noFill/>
+          <a:ln/>
+        </p:spPr>
+        <p:txBody>
+          <a:bodyPr wrap="square" lIns="0" tIns="0" rIns="0" bIns="0" rtlCol="0" anchor="t"/>
+          <a:lstStyle/>
+          <a:p>
+            <a:pPr algn="l" indent="0" marL="0">
+              <a:buNone/>
+            </a:pPr>
+            <a:r>
+              <a:rPr lang="en-US" sz="1500" dirty="0">
+                <a:solidFill>
+                  <a:srgbClr val="A9B1D6"/>
+                </a:solidFill>
+                <a:latin typeface="Calibri" pitchFamily="34" charset="0"/>
+                <a:ea typeface="Calibri" pitchFamily="34" charset="-122"/>
+                <a:cs typeface="Calibri" pitchFamily="34" charset="-120"/>
+              </a:rPr>
+              <a:t>Bigger isn't automatically better — the real skill is matching the model to the job in front of you.</a:t>
+            </a:r>
+            <a:endParaRPr lang="en-US" sz="1500" dirty="0"/>
+          </a:p>
+        </p:txBody>
+      </p:sp>
+      <p:sp>
+        <p:nvSpPr>
+          <p:cNvPr id="5" name="Shape 3"/>
           <p:cNvSpPr/>
           <p:nvPr/>
         </p:nvSpPr>
         <p:spPr>
           <a:xfrm>
-            <a:off x="548640" y="2103120"/>
-            <a:ext cx="5440680" cy="3703320"/>
+            <a:off x="548640" y="2432304"/>
+            <a:ext cx="5440680" cy="3374136"/>
           </a:xfrm>
           <a:prstGeom prst="roundRect">
             <a:avLst>
-              <a:gd name="adj" fmla="val 2222"/>
+              <a:gd name="adj" fmla="val 2439"/>
             </a:avLst>
           </a:prstGeom>
           <a:solidFill>
@@ -5824,13 +5941,13 @@
       </p:sp>
       <p:sp>
         <p:nvSpPr>
-          <p:cNvPr id="5" name="Shape 3"/>
+          <p:cNvPr id="6" name="Shape 4"/>
           <p:cNvSpPr/>
           <p:nvPr/>
         </p:nvSpPr>
         <p:spPr>
           <a:xfrm>
-            <a:off x="822960" y="2395728"/>
+            <a:off x="822960" y="2724912"/>
             <a:ext cx="457200" cy="457200"/>
           </a:xfrm>
           <a:prstGeom prst="ellipse">
@@ -5844,13 +5961,13 @@
       </p:sp>
       <p:sp>
         <p:nvSpPr>
-          <p:cNvPr id="6" name="Text 4"/>
-          <p:cNvSpPr txBox="1"/>
-          <p:nvPr/>
-        </p:nvSpPr>
-        <p:spPr>
-          <a:xfrm>
-            <a:off x="822960" y="2395728"/>
+          <p:cNvPr id="7" name="Text 5"/>
+          <p:cNvSpPr txBox="1"/>
+          <p:nvPr/>
+        </p:nvSpPr>
+        <p:spPr>
+          <a:xfrm>
+            <a:off x="822960" y="2724912"/>
             <a:ext cx="457200" cy="457200"/>
           </a:xfrm>
           <a:prstGeom prst="rect">
@@ -5883,13 +6000,13 @@
       </p:sp>
       <p:sp>
         <p:nvSpPr>
-          <p:cNvPr id="7" name="Text 5"/>
-          <p:cNvSpPr txBox="1"/>
-          <p:nvPr/>
-        </p:nvSpPr>
-        <p:spPr>
-          <a:xfrm>
-            <a:off x="1417320" y="2359152"/>
+          <p:cNvPr id="8" name="Text 6"/>
+          <p:cNvSpPr txBox="1"/>
+          <p:nvPr/>
+        </p:nvSpPr>
+        <p:spPr>
+          <a:xfrm>
+            <a:off x="1417320" y="2688336"/>
             <a:ext cx="4343400" cy="548640"/>
           </a:xfrm>
           <a:prstGeom prst="rect">
@@ -5922,14 +6039,14 @@
       </p:sp>
       <p:sp>
         <p:nvSpPr>
-          <p:cNvPr id="8" name="Text 6"/>
-          <p:cNvSpPr txBox="1"/>
-          <p:nvPr/>
-        </p:nvSpPr>
-        <p:spPr>
-          <a:xfrm>
-            <a:off x="868680" y="3063240"/>
-            <a:ext cx="4800600" cy="2560320"/>
+          <p:cNvPr id="9" name="Text 7"/>
+          <p:cNvSpPr txBox="1"/>
+          <p:nvPr/>
+        </p:nvSpPr>
+        <p:spPr>
+          <a:xfrm>
+            <a:off x="868680" y="3392424"/>
+            <a:ext cx="4800600" cy="2231136"/>
           </a:xfrm>
           <a:prstGeom prst="rect">
             <a:avLst/>
@@ -6028,18 +6145,18 @@
       </p:sp>
       <p:sp>
         <p:nvSpPr>
-          <p:cNvPr id="9" name="Shape 7"/>
+          <p:cNvPr id="10" name="Shape 8"/>
           <p:cNvSpPr/>
           <p:nvPr/>
         </p:nvSpPr>
         <p:spPr>
           <a:xfrm>
-            <a:off x="6199632" y="2103120"/>
-            <a:ext cx="5440680" cy="3703320"/>
+            <a:off x="6199632" y="2432304"/>
+            <a:ext cx="5440680" cy="3374136"/>
           </a:xfrm>
           <a:prstGeom prst="roundRect">
             <a:avLst>
-              <a:gd name="adj" fmla="val 2222"/>
+              <a:gd name="adj" fmla="val 2439"/>
             </a:avLst>
           </a:prstGeom>
           <a:solidFill>
@@ -6055,13 +6172,13 @@
       </p:sp>
       <p:sp>
         <p:nvSpPr>
-          <p:cNvPr id="10" name="Shape 8"/>
+          <p:cNvPr id="11" name="Shape 9"/>
           <p:cNvSpPr/>
           <p:nvPr/>
         </p:nvSpPr>
         <p:spPr>
           <a:xfrm>
-            <a:off x="6473952" y="2395728"/>
+            <a:off x="6473952" y="2724912"/>
             <a:ext cx="457200" cy="457200"/>
           </a:xfrm>
           <a:prstGeom prst="ellipse">
@@ -6075,13 +6192,13 @@
       </p:sp>
       <p:sp>
         <p:nvSpPr>
-          <p:cNvPr id="11" name="Text 9"/>
-          <p:cNvSpPr txBox="1"/>
-          <p:nvPr/>
-        </p:nvSpPr>
-        <p:spPr>
-          <a:xfrm>
-            <a:off x="6473952" y="2395728"/>
+          <p:cNvPr id="12" name="Text 10"/>
+          <p:cNvSpPr txBox="1"/>
+          <p:nvPr/>
+        </p:nvSpPr>
+        <p:spPr>
+          <a:xfrm>
+            <a:off x="6473952" y="2724912"/>
             <a:ext cx="457200" cy="457200"/>
           </a:xfrm>
           <a:prstGeom prst="rect">
@@ -6114,13 +6231,13 @@
       </p:sp>
       <p:sp>
         <p:nvSpPr>
-          <p:cNvPr id="12" name="Text 10"/>
-          <p:cNvSpPr txBox="1"/>
-          <p:nvPr/>
-        </p:nvSpPr>
-        <p:spPr>
-          <a:xfrm>
-            <a:off x="7068312" y="2359152"/>
+          <p:cNvPr id="13" name="Text 11"/>
+          <p:cNvSpPr txBox="1"/>
+          <p:nvPr/>
+        </p:nvSpPr>
+        <p:spPr>
+          <a:xfrm>
+            <a:off x="7068312" y="2688336"/>
             <a:ext cx="4343400" cy="548640"/>
           </a:xfrm>
           <a:prstGeom prst="rect">
@@ -6153,14 +6270,14 @@
       </p:sp>
       <p:sp>
         <p:nvSpPr>
-          <p:cNvPr id="13" name="Text 11"/>
-          <p:cNvSpPr txBox="1"/>
-          <p:nvPr/>
-        </p:nvSpPr>
-        <p:spPr>
-          <a:xfrm>
-            <a:off x="6519672" y="3063240"/>
-            <a:ext cx="4800600" cy="2560320"/>
+          <p:cNvPr id="14" name="Text 12"/>
+          <p:cNvSpPr txBox="1"/>
+          <p:nvPr/>
+        </p:nvSpPr>
+        <p:spPr>
+          <a:xfrm>
+            <a:off x="6519672" y="3392424"/>
+            <a:ext cx="4800600" cy="2231136"/>
           </a:xfrm>
           <a:prstGeom prst="rect">
             <a:avLst/>
@@ -6259,7 +6376,7 @@
       </p:sp>
       <p:sp>
         <p:nvSpPr>
-          <p:cNvPr id="14" name="Shape 12"/>
+          <p:cNvPr id="15" name="Shape 13"/>
           <p:cNvSpPr/>
           <p:nvPr/>
         </p:nvSpPr>
@@ -6281,7 +6398,7 @@
       </p:sp>
       <p:sp>
         <p:nvSpPr>
-          <p:cNvPr id="15" name="Text 13"/>
+          <p:cNvPr id="16" name="Text 14"/>
           <p:cNvSpPr txBox="1"/>
           <p:nvPr/>
         </p:nvSpPr>
@@ -6320,7 +6437,7 @@
       </p:sp>
       <p:sp>
         <p:nvSpPr>
-          <p:cNvPr id="16" name="Text 14"/>
+          <p:cNvPr id="17" name="Text 15"/>
           <p:cNvSpPr txBox="1"/>
           <p:nvPr/>
         </p:nvSpPr>
@@ -6359,7 +6476,7 @@
       </p:sp>
       <p:sp>
         <p:nvSpPr>
-          <p:cNvPr id="17" name="Text 15"/>
+          <p:cNvPr id="18" name="Text 16"/>
           <p:cNvSpPr txBox="1"/>
           <p:nvPr/>
         </p:nvSpPr>
@@ -6514,8 +6631,47 @@
         </p:nvSpPr>
         <p:spPr>
           <a:xfrm>
-            <a:off x="548640" y="2011680"/>
-            <a:ext cx="6126480" cy="3840480"/>
+            <a:off x="548640" y="1627632"/>
+            <a:ext cx="10881360" cy="502920"/>
+          </a:xfrm>
+          <a:prstGeom prst="rect">
+            <a:avLst/>
+          </a:prstGeom>
+          <a:noFill/>
+          <a:ln/>
+        </p:spPr>
+        <p:txBody>
+          <a:bodyPr wrap="square" lIns="0" tIns="0" rIns="0" bIns="0" rtlCol="0" anchor="t"/>
+          <a:lstStyle/>
+          <a:p>
+            <a:pPr algn="l" indent="0" marL="0">
+              <a:buNone/>
+            </a:pPr>
+            <a:r>
+              <a:rPr lang="en-US" sz="1500" dirty="0">
+                <a:solidFill>
+                  <a:srgbClr val="A9B1D6"/>
+                </a:solidFill>
+                <a:latin typeface="Calibri" pitchFamily="34" charset="0"/>
+                <a:ea typeface="Calibri" pitchFamily="34" charset="-122"/>
+                <a:cs typeface="Calibri" pitchFamily="34" charset="-120"/>
+              </a:rPr>
+              <a:t>The cheapest, fastest token is the one you never sent — here's how to trim without losing quality.</a:t>
+            </a:r>
+            <a:endParaRPr lang="en-US" sz="1500" dirty="0"/>
+          </a:p>
+        </p:txBody>
+      </p:sp>
+      <p:sp>
+        <p:nvSpPr>
+          <p:cNvPr id="5" name="Text 3"/>
+          <p:cNvSpPr txBox="1"/>
+          <p:nvPr/>
+        </p:nvSpPr>
+        <p:spPr>
+          <a:xfrm>
+            <a:off x="548640" y="2340864"/>
+            <a:ext cx="6126480" cy="3511296"/>
           </a:xfrm>
           <a:prstGeom prst="rect">
             <a:avLst/>
@@ -6653,18 +6809,18 @@
       </p:sp>
       <p:sp>
         <p:nvSpPr>
-          <p:cNvPr id="5" name="Shape 3"/>
+          <p:cNvPr id="6" name="Shape 4"/>
           <p:cNvSpPr/>
           <p:nvPr/>
         </p:nvSpPr>
         <p:spPr>
           <a:xfrm>
-            <a:off x="6995160" y="2148840"/>
-            <a:ext cx="4645152" cy="3383280"/>
+            <a:off x="6995160" y="2478024"/>
+            <a:ext cx="4645152" cy="3054096"/>
           </a:xfrm>
           <a:prstGeom prst="roundRect">
             <a:avLst>
-              <a:gd name="adj" fmla="val 2432"/>
+              <a:gd name="adj" fmla="val 2695"/>
             </a:avLst>
           </a:prstGeom>
           <a:solidFill>
@@ -6680,13 +6836,13 @@
       </p:sp>
       <p:sp>
         <p:nvSpPr>
-          <p:cNvPr id="6" name="Shape 4"/>
+          <p:cNvPr id="7" name="Shape 5"/>
           <p:cNvSpPr/>
           <p:nvPr/>
         </p:nvSpPr>
         <p:spPr>
           <a:xfrm>
-            <a:off x="7269480" y="2423160"/>
+            <a:off x="7269480" y="2752344"/>
             <a:ext cx="457200" cy="457200"/>
           </a:xfrm>
           <a:prstGeom prst="ellipse">
@@ -6700,13 +6856,13 @@
       </p:sp>
       <p:sp>
         <p:nvSpPr>
-          <p:cNvPr id="7" name="Text 5"/>
-          <p:cNvSpPr txBox="1"/>
-          <p:nvPr/>
-        </p:nvSpPr>
-        <p:spPr>
-          <a:xfrm>
-            <a:off x="7818120" y="2450592"/>
+          <p:cNvPr id="8" name="Text 6"/>
+          <p:cNvSpPr txBox="1"/>
+          <p:nvPr/>
+        </p:nvSpPr>
+        <p:spPr>
+          <a:xfrm>
+            <a:off x="7818120" y="2779776"/>
             <a:ext cx="3657600" cy="411480"/>
           </a:xfrm>
           <a:prstGeom prst="rect">
@@ -6739,14 +6895,14 @@
       </p:sp>
       <p:sp>
         <p:nvSpPr>
-          <p:cNvPr id="8" name="Text 6"/>
-          <p:cNvSpPr txBox="1"/>
-          <p:nvPr/>
-        </p:nvSpPr>
-        <p:spPr>
-          <a:xfrm>
-            <a:off x="7269480" y="3108960"/>
-            <a:ext cx="4160520" cy="2286000"/>
+          <p:cNvPr id="9" name="Text 7"/>
+          <p:cNvSpPr txBox="1"/>
+          <p:nvPr/>
+        </p:nvSpPr>
+        <p:spPr>
+          <a:xfrm>
+            <a:off x="7269480" y="3438144"/>
+            <a:ext cx="4160520" cy="1865376"/>
           </a:xfrm>
           <a:prstGeom prst="rect">
             <a:avLst/>
@@ -6778,7 +6934,7 @@
       </p:sp>
       <p:sp>
         <p:nvSpPr>
-          <p:cNvPr id="9" name="Shape 7"/>
+          <p:cNvPr id="10" name="Shape 8"/>
           <p:cNvSpPr/>
           <p:nvPr/>
         </p:nvSpPr>
@@ -6800,7 +6956,7 @@
       </p:sp>
       <p:sp>
         <p:nvSpPr>
-          <p:cNvPr id="10" name="Text 8"/>
+          <p:cNvPr id="11" name="Text 9"/>
           <p:cNvSpPr txBox="1"/>
           <p:nvPr/>
         </p:nvSpPr>
@@ -6839,7 +6995,7 @@
       </p:sp>
       <p:sp>
         <p:nvSpPr>
-          <p:cNvPr id="11" name="Text 9"/>
+          <p:cNvPr id="12" name="Text 10"/>
           <p:cNvSpPr txBox="1"/>
           <p:nvPr/>
         </p:nvSpPr>
@@ -6878,7 +7034,7 @@
       </p:sp>
       <p:sp>
         <p:nvSpPr>
-          <p:cNvPr id="12" name="Text 10"/>
+          <p:cNvPr id="13" name="Text 11"/>
           <p:cNvSpPr txBox="1"/>
           <p:nvPr/>
         </p:nvSpPr>
@@ -7033,8 +7189,47 @@
         </p:nvSpPr>
         <p:spPr>
           <a:xfrm>
-            <a:off x="548640" y="2011680"/>
-            <a:ext cx="6126480" cy="3840480"/>
+            <a:off x="548640" y="1627632"/>
+            <a:ext cx="10881360" cy="502920"/>
+          </a:xfrm>
+          <a:prstGeom prst="rect">
+            <a:avLst/>
+          </a:prstGeom>
+          <a:noFill/>
+          <a:ln/>
+        </p:spPr>
+        <p:txBody>
+          <a:bodyPr wrap="square" lIns="0" tIns="0" rIns="0" bIns="0" rtlCol="0" anchor="t"/>
+          <a:lstStyle/>
+          <a:p>
+            <a:pPr algn="l" indent="0" marL="0">
+              <a:buNone/>
+            </a:pPr>
+            <a:r>
+              <a:rPr lang="en-US" sz="1500" dirty="0">
+                <a:solidFill>
+                  <a:srgbClr val="A9B1D6"/>
+                </a:solidFill>
+                <a:latin typeface="Calibri" pitchFamily="34" charset="0"/>
+                <a:ea typeface="Calibri" pitchFamily="34" charset="-122"/>
+                <a:cs typeface="Calibri" pitchFamily="34" charset="-120"/>
+              </a:rPr>
+              <a:t>The unglamorous patterns that separate a demo from something you'd actually put in front of users.</a:t>
+            </a:r>
+            <a:endParaRPr lang="en-US" sz="1500" dirty="0"/>
+          </a:p>
+        </p:txBody>
+      </p:sp>
+      <p:sp>
+        <p:nvSpPr>
+          <p:cNvPr id="5" name="Text 3"/>
+          <p:cNvSpPr txBox="1"/>
+          <p:nvPr/>
+        </p:nvSpPr>
+        <p:spPr>
+          <a:xfrm>
+            <a:off x="548640" y="2340864"/>
+            <a:ext cx="6126480" cy="3511296"/>
           </a:xfrm>
           <a:prstGeom prst="rect">
             <a:avLst/>
@@ -7213,18 +7408,18 @@
       </p:sp>
       <p:sp>
         <p:nvSpPr>
-          <p:cNvPr id="5" name="Shape 3"/>
+          <p:cNvPr id="6" name="Shape 4"/>
           <p:cNvSpPr/>
           <p:nvPr/>
         </p:nvSpPr>
         <p:spPr>
           <a:xfrm>
-            <a:off x="6995160" y="2148840"/>
-            <a:ext cx="4645152" cy="3383280"/>
+            <a:off x="6995160" y="2478024"/>
+            <a:ext cx="4645152" cy="3054096"/>
           </a:xfrm>
           <a:prstGeom prst="roundRect">
             <a:avLst>
-              <a:gd name="adj" fmla="val 2432"/>
+              <a:gd name="adj" fmla="val 2695"/>
             </a:avLst>
           </a:prstGeom>
           <a:solidFill>
@@ -7240,13 +7435,13 @@
       </p:sp>
       <p:sp>
         <p:nvSpPr>
-          <p:cNvPr id="6" name="Shape 4"/>
+          <p:cNvPr id="7" name="Shape 5"/>
           <p:cNvSpPr/>
           <p:nvPr/>
         </p:nvSpPr>
         <p:spPr>
           <a:xfrm>
-            <a:off x="7269480" y="2423160"/>
+            <a:off x="7269480" y="2752344"/>
             <a:ext cx="457200" cy="457200"/>
           </a:xfrm>
           <a:prstGeom prst="ellipse">
@@ -7260,13 +7455,13 @@
       </p:sp>
       <p:sp>
         <p:nvSpPr>
-          <p:cNvPr id="7" name="Text 5"/>
-          <p:cNvSpPr txBox="1"/>
-          <p:nvPr/>
-        </p:nvSpPr>
-        <p:spPr>
-          <a:xfrm>
-            <a:off x="7818120" y="2450592"/>
+          <p:cNvPr id="8" name="Text 6"/>
+          <p:cNvSpPr txBox="1"/>
+          <p:nvPr/>
+        </p:nvSpPr>
+        <p:spPr>
+          <a:xfrm>
+            <a:off x="7818120" y="2779776"/>
             <a:ext cx="3657600" cy="411480"/>
           </a:xfrm>
           <a:prstGeom prst="rect">
@@ -7299,14 +7494,14 @@
       </p:sp>
       <p:sp>
         <p:nvSpPr>
-          <p:cNvPr id="8" name="Text 6"/>
-          <p:cNvSpPr txBox="1"/>
-          <p:nvPr/>
-        </p:nvSpPr>
-        <p:spPr>
-          <a:xfrm>
-            <a:off x="7269480" y="3108960"/>
-            <a:ext cx="4160520" cy="2286000"/>
+          <p:cNvPr id="9" name="Text 7"/>
+          <p:cNvSpPr txBox="1"/>
+          <p:nvPr/>
+        </p:nvSpPr>
+        <p:spPr>
+          <a:xfrm>
+            <a:off x="7269480" y="3438144"/>
+            <a:ext cx="4160520" cy="1865376"/>
           </a:xfrm>
           <a:prstGeom prst="rect">
             <a:avLst/>
@@ -7338,7 +7533,7 @@
       </p:sp>
       <p:sp>
         <p:nvSpPr>
-          <p:cNvPr id="9" name="Shape 7"/>
+          <p:cNvPr id="10" name="Shape 8"/>
           <p:cNvSpPr/>
           <p:nvPr/>
         </p:nvSpPr>
@@ -7360,7 +7555,7 @@
       </p:sp>
       <p:sp>
         <p:nvSpPr>
-          <p:cNvPr id="10" name="Text 8"/>
+          <p:cNvPr id="11" name="Text 9"/>
           <p:cNvSpPr txBox="1"/>
           <p:nvPr/>
         </p:nvSpPr>
@@ -7399,7 +7594,7 @@
       </p:sp>
       <p:sp>
         <p:nvSpPr>
-          <p:cNvPr id="11" name="Text 9"/>
+          <p:cNvPr id="12" name="Text 10"/>
           <p:cNvSpPr txBox="1"/>
           <p:nvPr/>
         </p:nvSpPr>
@@ -7438,7 +7633,7 @@
       </p:sp>
       <p:sp>
         <p:nvSpPr>
-          <p:cNvPr id="12" name="Text 10"/>
+          <p:cNvPr id="13" name="Text 11"/>
           <p:cNvSpPr txBox="1"/>
           <p:nvPr/>
         </p:nvSpPr>
